--- a/P4_Auditez_un_environnement_de_donnees_bailleul_aymeric/P4_Auditez_un_environnement_de_donnees_bailleul_aymeric/ABAI_P4_01_presentation_POC.pptx
+++ b/P4_Auditez_un_environnement_de_donnees_bailleul_aymeric/P4_Auditez_un_environnement_de_donnees_bailleul_aymeric/ABAI_P4_01_presentation_POC.pptx
@@ -11663,15 +11663,18 @@
                   <a:schemeClr val="bg1"/>
                 </a:solidFill>
               </a:rPr>
-              <a:t>Explication des logs (quelle table, quelle modification…)</a:t>
-            </a:r>
-          </a:p>
-          <a:p>
-            <a:endParaRPr lang="fr-FR" sz="1000" u="sng" dirty="0">
-              <a:solidFill>
-                <a:schemeClr val="bg1"/>
-              </a:solidFill>
-            </a:endParaRPr>
+              <a:t>Explication des logs (nombres de logs par table et par actions)</a:t>
+            </a:r>
+          </a:p>
+          <a:p>
+            <a:r>
+              <a:rPr lang="fr-FR" sz="1000" u="sng" dirty="0">
+                <a:solidFill>
+                  <a:schemeClr val="bg1"/>
+                </a:solidFill>
+              </a:rPr>
+              <a:t>quelle</a:t>
+            </a:r>
           </a:p>
           <a:p>
             <a:r>
@@ -18189,6 +18192,11 @@
           </a:bodyPr>
           <a:lstStyle/>
           <a:p>
+            <a:pPr>
+              <a:buClr>
+                <a:schemeClr val="bg1"/>
+              </a:buClr>
+            </a:pPr>
             <a:r>
               <a:rPr lang="fr-FR" sz="1200" b="1" u="sng" dirty="0">
                 <a:solidFill>
@@ -18201,8 +18209,11 @@
           </a:p>
           <a:p>
             <a:pPr marL="171450" indent="-171450">
-              <a:buFontTx/>
-              <a:buChar char="-"/>
+              <a:buClr>
+                <a:schemeClr val="bg1"/>
+              </a:buClr>
+              <a:buFont typeface="Arial" panose="020B0604020202020204" pitchFamily="34" charset="0"/>
+              <a:buChar char="•"/>
             </a:pPr>
             <a:r>
               <a:rPr lang="fr-FR" sz="1000" dirty="0">
@@ -18233,6 +18244,13 @@
             </a:r>
           </a:p>
           <a:p>
+            <a:pPr marL="171450" indent="-171450">
+              <a:buClr>
+                <a:schemeClr val="bg1"/>
+              </a:buClr>
+              <a:buFont typeface="Arial" panose="020B0604020202020204" pitchFamily="34" charset="0"/>
+              <a:buChar char="•"/>
+            </a:pPr>
             <a:endParaRPr lang="fr-FR" sz="1000" dirty="0">
               <a:solidFill>
                 <a:schemeClr val="bg1"/>
@@ -18241,6 +18259,11 @@
             </a:endParaRPr>
           </a:p>
           <a:p>
+            <a:pPr>
+              <a:buClr>
+                <a:schemeClr val="bg1"/>
+              </a:buClr>
+            </a:pPr>
             <a:r>
               <a:rPr lang="fr-FR" sz="1200" b="1" u="sng" dirty="0">
                 <a:solidFill>
@@ -18253,8 +18276,11 @@
           </a:p>
           <a:p>
             <a:pPr marL="171450" indent="-171450">
-              <a:buFontTx/>
-              <a:buChar char="-"/>
+              <a:buClr>
+                <a:schemeClr val="bg1"/>
+              </a:buClr>
+              <a:buFont typeface="Arial" panose="020B0604020202020204" pitchFamily="34" charset="0"/>
+              <a:buChar char="•"/>
             </a:pPr>
             <a:r>
               <a:rPr lang="fr-FR" sz="1000" dirty="0">
@@ -18303,6 +18329,13 @@
             </a:r>
           </a:p>
           <a:p>
+            <a:pPr marL="171450" indent="-171450">
+              <a:buClr>
+                <a:schemeClr val="bg1"/>
+              </a:buClr>
+              <a:buFont typeface="Arial" panose="020B0604020202020204" pitchFamily="34" charset="0"/>
+              <a:buChar char="•"/>
+            </a:pPr>
             <a:endParaRPr lang="fr-FR" sz="1000" dirty="0">
               <a:solidFill>
                 <a:schemeClr val="bg1"/>
@@ -18311,6 +18344,11 @@
             </a:endParaRPr>
           </a:p>
           <a:p>
+            <a:pPr>
+              <a:buClr>
+                <a:schemeClr val="bg1"/>
+              </a:buClr>
+            </a:pPr>
             <a:r>
               <a:rPr lang="fr-FR" sz="1200" b="1" u="sng" dirty="0">
                 <a:solidFill>
@@ -18323,8 +18361,11 @@
           </a:p>
           <a:p>
             <a:pPr marL="171450" indent="-171450">
-              <a:buFontTx/>
-              <a:buChar char="-"/>
+              <a:buClr>
+                <a:schemeClr val="bg1"/>
+              </a:buClr>
+              <a:buFont typeface="Arial" panose="020B0604020202020204" pitchFamily="34" charset="0"/>
+              <a:buChar char="•"/>
             </a:pPr>
             <a:r>
               <a:rPr lang="fr-FR" sz="1000" dirty="0">

--- a/P4_Auditez_un_environnement_de_donnees_bailleul_aymeric/P4_Auditez_un_environnement_de_donnees_bailleul_aymeric/ABAI_P4_01_presentation_POC.pptx
+++ b/P4_Auditez_un_environnement_de_donnees_bailleul_aymeric/P4_Auditez_un_environnement_de_donnees_bailleul_aymeric/ABAI_P4_01_presentation_POC.pptx
@@ -19,8 +19,8 @@
     <p:sldId id="264" r:id="rId10"/>
     <p:sldId id="273" r:id="rId11"/>
     <p:sldId id="274" r:id="rId12"/>
-    <p:sldId id="275" r:id="rId13"/>
-    <p:sldId id="266" r:id="rId14"/>
+    <p:sldId id="266" r:id="rId13"/>
+    <p:sldId id="275" r:id="rId14"/>
     <p:sldId id="276" r:id="rId15"/>
     <p:sldId id="267" r:id="rId16"/>
     <p:sldId id="277" r:id="rId17"/>
@@ -1106,6 +1106,110 @@
   <p:cSld>
     <p:spTree>
       <p:nvGrpSpPr>
+        <p:cNvPr id="1" name="Shape 190"/>
+        <p:cNvGrpSpPr/>
+        <p:nvPr/>
+      </p:nvGrpSpPr>
+      <p:grpSpPr>
+        <a:xfrm>
+          <a:off x="0" y="0"/>
+          <a:ext cx="0" cy="0"/>
+          <a:chOff x="0" y="0"/>
+          <a:chExt cx="0" cy="0"/>
+        </a:xfrm>
+      </p:grpSpPr>
+      <p:sp>
+        <p:nvSpPr>
+          <p:cNvPr id="191" name="Google Shape;191;g2efd6a1ad4f_0_25:notes"/>
+          <p:cNvSpPr>
+            <a:spLocks noGrp="1" noRot="1" noChangeAspect="1"/>
+          </p:cNvSpPr>
+          <p:nvPr>
+            <p:ph type="sldImg" idx="2"/>
+          </p:nvPr>
+        </p:nvSpPr>
+        <p:spPr>
+          <a:xfrm>
+            <a:off x="381000" y="685800"/>
+            <a:ext cx="6096000" cy="3429000"/>
+          </a:xfrm>
+          <a:custGeom>
+            <a:avLst/>
+            <a:gdLst/>
+            <a:ahLst/>
+            <a:cxnLst/>
+            <a:rect l="l" t="t" r="r" b="b"/>
+            <a:pathLst>
+              <a:path w="120000" h="120000" extrusionOk="0">
+                <a:moveTo>
+                  <a:pt x="0" y="0"/>
+                </a:moveTo>
+                <a:lnTo>
+                  <a:pt x="120000" y="0"/>
+                </a:lnTo>
+                <a:lnTo>
+                  <a:pt x="120000" y="120000"/>
+                </a:lnTo>
+                <a:lnTo>
+                  <a:pt x="0" y="120000"/>
+                </a:lnTo>
+                <a:close/>
+              </a:path>
+            </a:pathLst>
+          </a:custGeom>
+        </p:spPr>
+      </p:sp>
+      <p:sp>
+        <p:nvSpPr>
+          <p:cNvPr id="192" name="Google Shape;192;g2efd6a1ad4f_0_25:notes"/>
+          <p:cNvSpPr txBox="1">
+            <a:spLocks noGrp="1"/>
+          </p:cNvSpPr>
+          <p:nvPr>
+            <p:ph type="body" idx="1"/>
+          </p:nvPr>
+        </p:nvSpPr>
+        <p:spPr>
+          <a:xfrm>
+            <a:off x="685800" y="4343400"/>
+            <a:ext cx="5486400" cy="4114800"/>
+          </a:xfrm>
+          <a:prstGeom prst="rect">
+            <a:avLst/>
+          </a:prstGeom>
+        </p:spPr>
+        <p:txBody>
+          <a:bodyPr spcFirstLastPara="1" wrap="square" lIns="91425" tIns="91425" rIns="91425" bIns="91425" anchor="t" anchorCtr="0">
+            <a:noAutofit/>
+          </a:bodyPr>
+          <a:lstStyle/>
+          <a:p>
+            <a:pPr marL="0" lvl="0" indent="0" algn="l" rtl="0">
+              <a:spcBef>
+                <a:spcPts val="0"/>
+              </a:spcBef>
+              <a:spcAft>
+                <a:spcPts val="0"/>
+              </a:spcAft>
+              <a:buNone/>
+            </a:pPr>
+            <a:endParaRPr/>
+          </a:p>
+        </p:txBody>
+      </p:sp>
+    </p:spTree>
+  </p:cSld>
+  <p:clrMapOvr>
+    <a:masterClrMapping/>
+  </p:clrMapOvr>
+</p:notes>
+</file>
+
+<file path=ppt/notesSlides/notesSlide13.xml><?xml version="1.0" encoding="utf-8"?>
+<p:notes xmlns:a="http://schemas.openxmlformats.org/drawingml/2006/main" xmlns:r="http://schemas.openxmlformats.org/officeDocument/2006/relationships" xmlns:p="http://schemas.openxmlformats.org/presentationml/2006/main" showMasterSp="0" showMasterPhAnim="0">
+  <p:cSld>
+    <p:spTree>
+      <p:nvGrpSpPr>
         <p:cNvPr id="1" name="Shape 190">
           <a:extLst>
             <a:ext uri="{FF2B5EF4-FFF2-40B4-BE49-F238E27FC236}">
@@ -1221,110 +1325,6 @@
         <p14:creationId xmlns:p14="http://schemas.microsoft.com/office/powerpoint/2010/main" val="1132167533"/>
       </p:ext>
     </p:extLst>
-  </p:cSld>
-  <p:clrMapOvr>
-    <a:masterClrMapping/>
-  </p:clrMapOvr>
-</p:notes>
-</file>
-
-<file path=ppt/notesSlides/notesSlide13.xml><?xml version="1.0" encoding="utf-8"?>
-<p:notes xmlns:a="http://schemas.openxmlformats.org/drawingml/2006/main" xmlns:r="http://schemas.openxmlformats.org/officeDocument/2006/relationships" xmlns:p="http://schemas.openxmlformats.org/presentationml/2006/main" showMasterSp="0" showMasterPhAnim="0">
-  <p:cSld>
-    <p:spTree>
-      <p:nvGrpSpPr>
-        <p:cNvPr id="1" name="Shape 190"/>
-        <p:cNvGrpSpPr/>
-        <p:nvPr/>
-      </p:nvGrpSpPr>
-      <p:grpSpPr>
-        <a:xfrm>
-          <a:off x="0" y="0"/>
-          <a:ext cx="0" cy="0"/>
-          <a:chOff x="0" y="0"/>
-          <a:chExt cx="0" cy="0"/>
-        </a:xfrm>
-      </p:grpSpPr>
-      <p:sp>
-        <p:nvSpPr>
-          <p:cNvPr id="191" name="Google Shape;191;g2efd6a1ad4f_0_25:notes"/>
-          <p:cNvSpPr>
-            <a:spLocks noGrp="1" noRot="1" noChangeAspect="1"/>
-          </p:cNvSpPr>
-          <p:nvPr>
-            <p:ph type="sldImg" idx="2"/>
-          </p:nvPr>
-        </p:nvSpPr>
-        <p:spPr>
-          <a:xfrm>
-            <a:off x="381000" y="685800"/>
-            <a:ext cx="6096000" cy="3429000"/>
-          </a:xfrm>
-          <a:custGeom>
-            <a:avLst/>
-            <a:gdLst/>
-            <a:ahLst/>
-            <a:cxnLst/>
-            <a:rect l="l" t="t" r="r" b="b"/>
-            <a:pathLst>
-              <a:path w="120000" h="120000" extrusionOk="0">
-                <a:moveTo>
-                  <a:pt x="0" y="0"/>
-                </a:moveTo>
-                <a:lnTo>
-                  <a:pt x="120000" y="0"/>
-                </a:lnTo>
-                <a:lnTo>
-                  <a:pt x="120000" y="120000"/>
-                </a:lnTo>
-                <a:lnTo>
-                  <a:pt x="0" y="120000"/>
-                </a:lnTo>
-                <a:close/>
-              </a:path>
-            </a:pathLst>
-          </a:custGeom>
-        </p:spPr>
-      </p:sp>
-      <p:sp>
-        <p:nvSpPr>
-          <p:cNvPr id="192" name="Google Shape;192;g2efd6a1ad4f_0_25:notes"/>
-          <p:cNvSpPr txBox="1">
-            <a:spLocks noGrp="1"/>
-          </p:cNvSpPr>
-          <p:nvPr>
-            <p:ph type="body" idx="1"/>
-          </p:nvPr>
-        </p:nvSpPr>
-        <p:spPr>
-          <a:xfrm>
-            <a:off x="685800" y="4343400"/>
-            <a:ext cx="5486400" cy="4114800"/>
-          </a:xfrm>
-          <a:prstGeom prst="rect">
-            <a:avLst/>
-          </a:prstGeom>
-        </p:spPr>
-        <p:txBody>
-          <a:bodyPr spcFirstLastPara="1" wrap="square" lIns="91425" tIns="91425" rIns="91425" bIns="91425" anchor="t" anchorCtr="0">
-            <a:noAutofit/>
-          </a:bodyPr>
-          <a:lstStyle/>
-          <a:p>
-            <a:pPr marL="0" lvl="0" indent="0" algn="l" rtl="0">
-              <a:spcBef>
-                <a:spcPts val="0"/>
-              </a:spcBef>
-              <a:spcAft>
-                <a:spcPts val="0"/>
-              </a:spcAft>
-              <a:buNone/>
-            </a:pPr>
-            <a:endParaRPr/>
-          </a:p>
-        </p:txBody>
-      </p:sp>
-    </p:spTree>
   </p:cSld>
   <p:clrMapOvr>
     <a:masterClrMapping/>
@@ -11930,6 +11930,288 @@
   <p:cSld>
     <p:spTree>
       <p:nvGrpSpPr>
+        <p:cNvPr id="1" name="Shape 193"/>
+        <p:cNvGrpSpPr/>
+        <p:nvPr/>
+      </p:nvGrpSpPr>
+      <p:grpSpPr>
+        <a:xfrm>
+          <a:off x="0" y="0"/>
+          <a:ext cx="0" cy="0"/>
+          <a:chOff x="0" y="0"/>
+          <a:chExt cx="0" cy="0"/>
+        </a:xfrm>
+      </p:grpSpPr>
+      <p:sp>
+        <p:nvSpPr>
+          <p:cNvPr id="194" name="Google Shape;194;p23"/>
+          <p:cNvSpPr txBox="1">
+            <a:spLocks noGrp="1"/>
+          </p:cNvSpPr>
+          <p:nvPr>
+            <p:ph type="title"/>
+          </p:nvPr>
+        </p:nvSpPr>
+        <p:spPr>
+          <a:xfrm>
+            <a:off x="1297500" y="393750"/>
+            <a:ext cx="7038900" cy="914100"/>
+          </a:xfrm>
+          <a:prstGeom prst="rect">
+            <a:avLst/>
+          </a:prstGeom>
+        </p:spPr>
+        <p:txBody>
+          <a:bodyPr spcFirstLastPara="1" wrap="square" lIns="91425" tIns="91425" rIns="91425" bIns="91425" anchor="t" anchorCtr="0">
+            <a:normAutofit fontScale="90000"/>
+          </a:bodyPr>
+          <a:lstStyle/>
+          <a:p>
+            <a:pPr marL="0" lvl="0" indent="0" algn="l" rtl="0">
+              <a:spcBef>
+                <a:spcPts val="0"/>
+              </a:spcBef>
+              <a:spcAft>
+                <a:spcPts val="0"/>
+              </a:spcAft>
+              <a:buNone/>
+            </a:pPr>
+            <a:r>
+              <a:rPr lang="fr" dirty="0">
+                <a:latin typeface="+mj-lt"/>
+              </a:rPr>
+              <a:t>Compréhension des problèmes sur la base des logs</a:t>
+            </a:r>
+            <a:endParaRPr dirty="0">
+              <a:latin typeface="+mj-lt"/>
+            </a:endParaRPr>
+          </a:p>
+        </p:txBody>
+      </p:sp>
+      <p:sp>
+        <p:nvSpPr>
+          <p:cNvPr id="2" name="ZoneTexte 1">
+            <a:extLst>
+              <a:ext uri="{FF2B5EF4-FFF2-40B4-BE49-F238E27FC236}">
+                <a16:creationId xmlns:a16="http://schemas.microsoft.com/office/drawing/2014/main" id="{C61EE836-A1A4-4EC6-4A40-478CA9FD7BA3}"/>
+              </a:ext>
+            </a:extLst>
+          </p:cNvPr>
+          <p:cNvSpPr txBox="1"/>
+          <p:nvPr/>
+        </p:nvSpPr>
+        <p:spPr>
+          <a:xfrm>
+            <a:off x="1297500" y="1957937"/>
+            <a:ext cx="7548612" cy="1785104"/>
+          </a:xfrm>
+          <a:prstGeom prst="rect">
+            <a:avLst/>
+          </a:prstGeom>
+          <a:noFill/>
+        </p:spPr>
+        <p:txBody>
+          <a:bodyPr wrap="square" rtlCol="0">
+            <a:spAutoFit/>
+          </a:bodyPr>
+          <a:lstStyle/>
+          <a:p>
+            <a:r>
+              <a:rPr lang="fr-FR" sz="1000" i="1" dirty="0">
+                <a:solidFill>
+                  <a:schemeClr val="bg1"/>
+                </a:solidFill>
+              </a:rPr>
+              <a:t>Avec la requête suivante on se rend compte que les logs contiennent des entrées pour le 14 mais aussi pour le 15 aout,</a:t>
+            </a:r>
+          </a:p>
+          <a:p>
+            <a:endParaRPr lang="fr-FR" sz="1000" dirty="0">
+              <a:solidFill>
+                <a:schemeClr val="bg1"/>
+              </a:solidFill>
+            </a:endParaRPr>
+          </a:p>
+          <a:p>
+            <a:r>
+              <a:rPr lang="fr-FR" sz="1000" dirty="0">
+                <a:solidFill>
+                  <a:schemeClr val="bg1"/>
+                </a:solidFill>
+              </a:rPr>
+              <a:t>SELECT</a:t>
+            </a:r>
+          </a:p>
+          <a:p>
+            <a:r>
+              <a:rPr lang="fr-FR" sz="1000" dirty="0">
+                <a:solidFill>
+                  <a:schemeClr val="bg1"/>
+                </a:solidFill>
+              </a:rPr>
+              <a:t>    DATE(date) AS </a:t>
+            </a:r>
+            <a:r>
+              <a:rPr lang="fr-FR" sz="1000" dirty="0" err="1">
+                <a:solidFill>
+                  <a:schemeClr val="bg1"/>
+                </a:solidFill>
+              </a:rPr>
+              <a:t>date_de_modification</a:t>
+            </a:r>
+            <a:r>
+              <a:rPr lang="fr-FR" sz="1000" dirty="0">
+                <a:solidFill>
+                  <a:schemeClr val="bg1"/>
+                </a:solidFill>
+              </a:rPr>
+              <a:t>,</a:t>
+            </a:r>
+          </a:p>
+          <a:p>
+            <a:r>
+              <a:rPr lang="fr-FR" sz="1000" dirty="0">
+                <a:solidFill>
+                  <a:schemeClr val="bg1"/>
+                </a:solidFill>
+              </a:rPr>
+              <a:t>    COUNT(*) AS </a:t>
+            </a:r>
+            <a:r>
+              <a:rPr lang="fr-FR" sz="1000" dirty="0" err="1">
+                <a:solidFill>
+                  <a:schemeClr val="bg1"/>
+                </a:solidFill>
+              </a:rPr>
+              <a:t>nombre_de_logs</a:t>
+            </a:r>
+            <a:endParaRPr lang="fr-FR" sz="1000" dirty="0">
+              <a:solidFill>
+                <a:schemeClr val="bg1"/>
+              </a:solidFill>
+            </a:endParaRPr>
+          </a:p>
+          <a:p>
+            <a:r>
+              <a:rPr lang="fr-FR" sz="1000" dirty="0">
+                <a:solidFill>
+                  <a:schemeClr val="bg1"/>
+                </a:solidFill>
+              </a:rPr>
+              <a:t>FROM</a:t>
+            </a:r>
+          </a:p>
+          <a:p>
+            <a:r>
+              <a:rPr lang="fr-FR" sz="1000" dirty="0">
+                <a:solidFill>
+                  <a:schemeClr val="bg1"/>
+                </a:solidFill>
+              </a:rPr>
+              <a:t>    logs</a:t>
+            </a:r>
+          </a:p>
+          <a:p>
+            <a:r>
+              <a:rPr lang="fr-FR" sz="1000" dirty="0">
+                <a:solidFill>
+                  <a:schemeClr val="bg1"/>
+                </a:solidFill>
+              </a:rPr>
+              <a:t>GROUP BY</a:t>
+            </a:r>
+          </a:p>
+          <a:p>
+            <a:r>
+              <a:rPr lang="fr-FR" sz="1000" dirty="0">
+                <a:solidFill>
+                  <a:schemeClr val="bg1"/>
+                </a:solidFill>
+              </a:rPr>
+              <a:t>    DATE(date)</a:t>
+            </a:r>
+          </a:p>
+          <a:p>
+            <a:r>
+              <a:rPr lang="fr-FR" sz="1000" dirty="0">
+                <a:solidFill>
+                  <a:schemeClr val="bg1"/>
+                </a:solidFill>
+              </a:rPr>
+              <a:t>ORDER BY</a:t>
+            </a:r>
+          </a:p>
+          <a:p>
+            <a:r>
+              <a:rPr lang="fr-FR" sz="1000" dirty="0">
+                <a:solidFill>
+                  <a:schemeClr val="bg1"/>
+                </a:solidFill>
+              </a:rPr>
+              <a:t>    </a:t>
+            </a:r>
+            <a:r>
+              <a:rPr lang="fr-FR" sz="1000" dirty="0" err="1">
+                <a:solidFill>
+                  <a:schemeClr val="bg1"/>
+                </a:solidFill>
+              </a:rPr>
+              <a:t>date_de_modification</a:t>
+            </a:r>
+            <a:r>
+              <a:rPr lang="fr-FR" sz="1000" dirty="0">
+                <a:solidFill>
+                  <a:schemeClr val="bg1"/>
+                </a:solidFill>
+              </a:rPr>
+              <a:t>;</a:t>
+            </a:r>
+          </a:p>
+        </p:txBody>
+      </p:sp>
+      <p:pic>
+        <p:nvPicPr>
+          <p:cNvPr id="4" name="Image 3">
+            <a:extLst>
+              <a:ext uri="{FF2B5EF4-FFF2-40B4-BE49-F238E27FC236}">
+                <a16:creationId xmlns:a16="http://schemas.microsoft.com/office/drawing/2014/main" id="{4A5AD75B-411B-26D8-C11C-9EF46011D801}"/>
+              </a:ext>
+            </a:extLst>
+          </p:cNvPr>
+          <p:cNvPicPr>
+            <a:picLocks noChangeAspect="1"/>
+          </p:cNvPicPr>
+          <p:nvPr/>
+        </p:nvPicPr>
+        <p:blipFill>
+          <a:blip r:embed="rId3"/>
+          <a:stretch>
+            <a:fillRect/>
+          </a:stretch>
+        </p:blipFill>
+        <p:spPr>
+          <a:xfrm>
+            <a:off x="5381166" y="2850489"/>
+            <a:ext cx="2465334" cy="684815"/>
+          </a:xfrm>
+          <a:prstGeom prst="rect">
+            <a:avLst/>
+          </a:prstGeom>
+        </p:spPr>
+      </p:pic>
+    </p:spTree>
+  </p:cSld>
+  <p:clrMapOvr>
+    <a:masterClrMapping/>
+  </p:clrMapOvr>
+</p:sld>
+</file>
+
+<file path=ppt/slides/slide13.xml><?xml version="1.0" encoding="utf-8"?>
+<p:sld xmlns:a="http://schemas.openxmlformats.org/drawingml/2006/main" xmlns:r="http://schemas.openxmlformats.org/officeDocument/2006/relationships" xmlns:p="http://schemas.openxmlformats.org/presentationml/2006/main">
+  <p:cSld>
+    <p:spTree>
+      <p:nvGrpSpPr>
         <p:cNvPr id="1" name="Shape 193">
           <a:extLst>
             <a:ext uri="{FF2B5EF4-FFF2-40B4-BE49-F238E27FC236}">
@@ -12345,288 +12627,6 @@
         <p14:creationId xmlns:p14="http://schemas.microsoft.com/office/powerpoint/2010/main" val="2847807231"/>
       </p:ext>
     </p:extLst>
-  </p:cSld>
-  <p:clrMapOvr>
-    <a:masterClrMapping/>
-  </p:clrMapOvr>
-</p:sld>
-</file>
-
-<file path=ppt/slides/slide13.xml><?xml version="1.0" encoding="utf-8"?>
-<p:sld xmlns:a="http://schemas.openxmlformats.org/drawingml/2006/main" xmlns:r="http://schemas.openxmlformats.org/officeDocument/2006/relationships" xmlns:p="http://schemas.openxmlformats.org/presentationml/2006/main">
-  <p:cSld>
-    <p:spTree>
-      <p:nvGrpSpPr>
-        <p:cNvPr id="1" name="Shape 193"/>
-        <p:cNvGrpSpPr/>
-        <p:nvPr/>
-      </p:nvGrpSpPr>
-      <p:grpSpPr>
-        <a:xfrm>
-          <a:off x="0" y="0"/>
-          <a:ext cx="0" cy="0"/>
-          <a:chOff x="0" y="0"/>
-          <a:chExt cx="0" cy="0"/>
-        </a:xfrm>
-      </p:grpSpPr>
-      <p:sp>
-        <p:nvSpPr>
-          <p:cNvPr id="194" name="Google Shape;194;p23"/>
-          <p:cNvSpPr txBox="1">
-            <a:spLocks noGrp="1"/>
-          </p:cNvSpPr>
-          <p:nvPr>
-            <p:ph type="title"/>
-          </p:nvPr>
-        </p:nvSpPr>
-        <p:spPr>
-          <a:xfrm>
-            <a:off x="1297500" y="393750"/>
-            <a:ext cx="7038900" cy="914100"/>
-          </a:xfrm>
-          <a:prstGeom prst="rect">
-            <a:avLst/>
-          </a:prstGeom>
-        </p:spPr>
-        <p:txBody>
-          <a:bodyPr spcFirstLastPara="1" wrap="square" lIns="91425" tIns="91425" rIns="91425" bIns="91425" anchor="t" anchorCtr="0">
-            <a:normAutofit fontScale="90000"/>
-          </a:bodyPr>
-          <a:lstStyle/>
-          <a:p>
-            <a:pPr marL="0" lvl="0" indent="0" algn="l" rtl="0">
-              <a:spcBef>
-                <a:spcPts val="0"/>
-              </a:spcBef>
-              <a:spcAft>
-                <a:spcPts val="0"/>
-              </a:spcAft>
-              <a:buNone/>
-            </a:pPr>
-            <a:r>
-              <a:rPr lang="fr" dirty="0">
-                <a:latin typeface="+mj-lt"/>
-              </a:rPr>
-              <a:t>Compréhension des problèmes sur la base des logs</a:t>
-            </a:r>
-            <a:endParaRPr dirty="0">
-              <a:latin typeface="+mj-lt"/>
-            </a:endParaRPr>
-          </a:p>
-        </p:txBody>
-      </p:sp>
-      <p:sp>
-        <p:nvSpPr>
-          <p:cNvPr id="2" name="ZoneTexte 1">
-            <a:extLst>
-              <a:ext uri="{FF2B5EF4-FFF2-40B4-BE49-F238E27FC236}">
-                <a16:creationId xmlns:a16="http://schemas.microsoft.com/office/drawing/2014/main" id="{C61EE836-A1A4-4EC6-4A40-478CA9FD7BA3}"/>
-              </a:ext>
-            </a:extLst>
-          </p:cNvPr>
-          <p:cNvSpPr txBox="1"/>
-          <p:nvPr/>
-        </p:nvSpPr>
-        <p:spPr>
-          <a:xfrm>
-            <a:off x="1297500" y="1957937"/>
-            <a:ext cx="7548612" cy="1785104"/>
-          </a:xfrm>
-          <a:prstGeom prst="rect">
-            <a:avLst/>
-          </a:prstGeom>
-          <a:noFill/>
-        </p:spPr>
-        <p:txBody>
-          <a:bodyPr wrap="square" rtlCol="0">
-            <a:spAutoFit/>
-          </a:bodyPr>
-          <a:lstStyle/>
-          <a:p>
-            <a:r>
-              <a:rPr lang="fr-FR" sz="1000" i="1" dirty="0">
-                <a:solidFill>
-                  <a:schemeClr val="bg1"/>
-                </a:solidFill>
-              </a:rPr>
-              <a:t>Avec la requête suivante on se rend compte que les logs contiennent des entrées pour le 14 mais aussi pour le 15 aout,</a:t>
-            </a:r>
-          </a:p>
-          <a:p>
-            <a:endParaRPr lang="fr-FR" sz="1000" dirty="0">
-              <a:solidFill>
-                <a:schemeClr val="bg1"/>
-              </a:solidFill>
-            </a:endParaRPr>
-          </a:p>
-          <a:p>
-            <a:r>
-              <a:rPr lang="fr-FR" sz="1000" dirty="0">
-                <a:solidFill>
-                  <a:schemeClr val="bg1"/>
-                </a:solidFill>
-              </a:rPr>
-              <a:t>SELECT</a:t>
-            </a:r>
-          </a:p>
-          <a:p>
-            <a:r>
-              <a:rPr lang="fr-FR" sz="1000" dirty="0">
-                <a:solidFill>
-                  <a:schemeClr val="bg1"/>
-                </a:solidFill>
-              </a:rPr>
-              <a:t>    DATE(date) AS </a:t>
-            </a:r>
-            <a:r>
-              <a:rPr lang="fr-FR" sz="1000" dirty="0" err="1">
-                <a:solidFill>
-                  <a:schemeClr val="bg1"/>
-                </a:solidFill>
-              </a:rPr>
-              <a:t>date_de_modification</a:t>
-            </a:r>
-            <a:r>
-              <a:rPr lang="fr-FR" sz="1000" dirty="0">
-                <a:solidFill>
-                  <a:schemeClr val="bg1"/>
-                </a:solidFill>
-              </a:rPr>
-              <a:t>,</a:t>
-            </a:r>
-          </a:p>
-          <a:p>
-            <a:r>
-              <a:rPr lang="fr-FR" sz="1000" dirty="0">
-                <a:solidFill>
-                  <a:schemeClr val="bg1"/>
-                </a:solidFill>
-              </a:rPr>
-              <a:t>    COUNT(*) AS </a:t>
-            </a:r>
-            <a:r>
-              <a:rPr lang="fr-FR" sz="1000" dirty="0" err="1">
-                <a:solidFill>
-                  <a:schemeClr val="bg1"/>
-                </a:solidFill>
-              </a:rPr>
-              <a:t>nombre_de_logs</a:t>
-            </a:r>
-            <a:endParaRPr lang="fr-FR" sz="1000" dirty="0">
-              <a:solidFill>
-                <a:schemeClr val="bg1"/>
-              </a:solidFill>
-            </a:endParaRPr>
-          </a:p>
-          <a:p>
-            <a:r>
-              <a:rPr lang="fr-FR" sz="1000" dirty="0">
-                <a:solidFill>
-                  <a:schemeClr val="bg1"/>
-                </a:solidFill>
-              </a:rPr>
-              <a:t>FROM</a:t>
-            </a:r>
-          </a:p>
-          <a:p>
-            <a:r>
-              <a:rPr lang="fr-FR" sz="1000" dirty="0">
-                <a:solidFill>
-                  <a:schemeClr val="bg1"/>
-                </a:solidFill>
-              </a:rPr>
-              <a:t>    logs</a:t>
-            </a:r>
-          </a:p>
-          <a:p>
-            <a:r>
-              <a:rPr lang="fr-FR" sz="1000" dirty="0">
-                <a:solidFill>
-                  <a:schemeClr val="bg1"/>
-                </a:solidFill>
-              </a:rPr>
-              <a:t>GROUP BY</a:t>
-            </a:r>
-          </a:p>
-          <a:p>
-            <a:r>
-              <a:rPr lang="fr-FR" sz="1000" dirty="0">
-                <a:solidFill>
-                  <a:schemeClr val="bg1"/>
-                </a:solidFill>
-              </a:rPr>
-              <a:t>    DATE(date)</a:t>
-            </a:r>
-          </a:p>
-          <a:p>
-            <a:r>
-              <a:rPr lang="fr-FR" sz="1000" dirty="0">
-                <a:solidFill>
-                  <a:schemeClr val="bg1"/>
-                </a:solidFill>
-              </a:rPr>
-              <a:t>ORDER BY</a:t>
-            </a:r>
-          </a:p>
-          <a:p>
-            <a:r>
-              <a:rPr lang="fr-FR" sz="1000" dirty="0">
-                <a:solidFill>
-                  <a:schemeClr val="bg1"/>
-                </a:solidFill>
-              </a:rPr>
-              <a:t>    </a:t>
-            </a:r>
-            <a:r>
-              <a:rPr lang="fr-FR" sz="1000" dirty="0" err="1">
-                <a:solidFill>
-                  <a:schemeClr val="bg1"/>
-                </a:solidFill>
-              </a:rPr>
-              <a:t>date_de_modification</a:t>
-            </a:r>
-            <a:r>
-              <a:rPr lang="fr-FR" sz="1000" dirty="0">
-                <a:solidFill>
-                  <a:schemeClr val="bg1"/>
-                </a:solidFill>
-              </a:rPr>
-              <a:t>;</a:t>
-            </a:r>
-          </a:p>
-        </p:txBody>
-      </p:sp>
-      <p:pic>
-        <p:nvPicPr>
-          <p:cNvPr id="4" name="Image 3">
-            <a:extLst>
-              <a:ext uri="{FF2B5EF4-FFF2-40B4-BE49-F238E27FC236}">
-                <a16:creationId xmlns:a16="http://schemas.microsoft.com/office/drawing/2014/main" id="{4A5AD75B-411B-26D8-C11C-9EF46011D801}"/>
-              </a:ext>
-            </a:extLst>
-          </p:cNvPr>
-          <p:cNvPicPr>
-            <a:picLocks noChangeAspect="1"/>
-          </p:cNvPicPr>
-          <p:nvPr/>
-        </p:nvPicPr>
-        <p:blipFill>
-          <a:blip r:embed="rId3"/>
-          <a:stretch>
-            <a:fillRect/>
-          </a:stretch>
-        </p:blipFill>
-        <p:spPr>
-          <a:xfrm>
-            <a:off x="5381166" y="2850489"/>
-            <a:ext cx="2465334" cy="684815"/>
-          </a:xfrm>
-          <a:prstGeom prst="rect">
-            <a:avLst/>
-          </a:prstGeom>
-        </p:spPr>
-      </p:pic>
-    </p:spTree>
   </p:cSld>
   <p:clrMapOvr>
     <a:masterClrMapping/>
@@ -12724,7 +12724,7 @@
         <p:spPr>
           <a:xfrm>
             <a:off x="930571" y="1740752"/>
-            <a:ext cx="7772758" cy="1415772"/>
+            <a:ext cx="7772758" cy="1661993"/>
           </a:xfrm>
           <a:prstGeom prst="rect">
             <a:avLst/>
@@ -12769,7 +12769,7 @@
           </a:p>
           <a:p>
             <a:r>
-              <a:rPr lang="fr-FR" sz="800" dirty="0">
+              <a:rPr lang="fr-FR" sz="1000" dirty="0">
                 <a:solidFill>
                   <a:schemeClr val="bg1"/>
                 </a:solidFill>
@@ -12779,7 +12779,7 @@
           </a:p>
           <a:p>
             <a:r>
-              <a:rPr lang="en-US" sz="800" dirty="0">
+              <a:rPr lang="en-US" sz="1000" dirty="0">
                 <a:solidFill>
                   <a:schemeClr val="bg1"/>
                 </a:solidFill>
@@ -12787,7 +12787,7 @@
               <a:t>    ROUND(CAST(SUM(</a:t>
             </a:r>
             <a:r>
-              <a:rPr lang="en-US" sz="800" dirty="0" err="1">
+              <a:rPr lang="en-US" sz="1000" dirty="0" err="1">
                 <a:solidFill>
                   <a:schemeClr val="bg1"/>
                 </a:solidFill>
@@ -12795,7 +12795,7 @@
               <a:t>p.prix</a:t>
             </a:r>
             <a:r>
-              <a:rPr lang="en-US" sz="800" dirty="0">
+              <a:rPr lang="en-US" sz="1000" dirty="0">
                 <a:solidFill>
                   <a:schemeClr val="bg1"/>
                 </a:solidFill>
@@ -12805,7 +12805,7 @@
           </a:p>
           <a:p>
             <a:r>
-              <a:rPr lang="fr-FR" sz="800" dirty="0">
+              <a:rPr lang="fr-FR" sz="1000" dirty="0">
                 <a:solidFill>
                   <a:schemeClr val="bg1"/>
                 </a:solidFill>
@@ -12815,7 +12815,7 @@
           </a:p>
           <a:p>
             <a:r>
-              <a:rPr lang="fr-FR" sz="800" dirty="0">
+              <a:rPr lang="fr-FR" sz="1000" dirty="0">
                 <a:solidFill>
                   <a:schemeClr val="bg1"/>
                 </a:solidFill>
@@ -12825,7 +12825,7 @@
           </a:p>
           <a:p>
             <a:r>
-              <a:rPr lang="fr-FR" sz="800" dirty="0">
+              <a:rPr lang="fr-FR" sz="1000" dirty="0">
                 <a:solidFill>
                   <a:schemeClr val="bg1"/>
                 </a:solidFill>
@@ -12835,7 +12835,7 @@
           </a:p>
           <a:p>
             <a:r>
-              <a:rPr lang="fr-FR" sz="800" dirty="0">
+              <a:rPr lang="fr-FR" sz="1000" dirty="0">
                 <a:solidFill>
                   <a:schemeClr val="bg1"/>
                 </a:solidFill>
@@ -12843,7 +12843,7 @@
               <a:t>    </a:t>
             </a:r>
             <a:r>
-              <a:rPr lang="fr-FR" sz="800" dirty="0" err="1">
+              <a:rPr lang="fr-FR" sz="1000" dirty="0" err="1">
                 <a:solidFill>
                   <a:schemeClr val="bg1"/>
                 </a:solidFill>
@@ -12851,7 +12851,7 @@
               <a:t>vue_logs_vente_detail</a:t>
             </a:r>
             <a:r>
-              <a:rPr lang="fr-FR" sz="800" dirty="0">
+              <a:rPr lang="fr-FR" sz="1000" dirty="0">
                 <a:solidFill>
                   <a:schemeClr val="bg1"/>
                 </a:solidFill>
@@ -12859,7 +12859,7 @@
               <a:t> AS </a:t>
             </a:r>
             <a:r>
-              <a:rPr lang="fr-FR" sz="800" dirty="0" err="1">
+              <a:rPr lang="fr-FR" sz="1000" dirty="0" err="1">
                 <a:solidFill>
                   <a:schemeClr val="bg1"/>
                 </a:solidFill>
@@ -12867,7 +12867,7 @@
               <a:t>vl</a:t>
             </a:r>
             <a:r>
-              <a:rPr lang="fr-FR" sz="800" dirty="0">
+              <a:rPr lang="fr-FR" sz="1000" dirty="0">
                 <a:solidFill>
                   <a:schemeClr val="bg1"/>
                 </a:solidFill>
@@ -12875,7 +12875,7 @@
               <a:t> ON </a:t>
             </a:r>
             <a:r>
-              <a:rPr lang="fr-FR" sz="800" dirty="0" err="1">
+              <a:rPr lang="fr-FR" sz="1000" dirty="0" err="1">
                 <a:solidFill>
                   <a:schemeClr val="bg1"/>
                 </a:solidFill>
@@ -12883,7 +12883,7 @@
               <a:t>vl.ean</a:t>
             </a:r>
             <a:r>
-              <a:rPr lang="fr-FR" sz="800" dirty="0">
+              <a:rPr lang="fr-FR" sz="1000" dirty="0">
                 <a:solidFill>
                   <a:schemeClr val="bg1"/>
                 </a:solidFill>
@@ -12891,14 +12891,14 @@
               <a:t> = </a:t>
             </a:r>
             <a:r>
-              <a:rPr lang="fr-FR" sz="800" dirty="0" err="1">
+              <a:rPr lang="fr-FR" sz="1000" dirty="0" err="1">
                 <a:solidFill>
                   <a:schemeClr val="bg1"/>
                 </a:solidFill>
               </a:rPr>
               <a:t>p.ean</a:t>
             </a:r>
-            <a:endParaRPr lang="fr-FR" sz="800" dirty="0">
+            <a:endParaRPr lang="fr-FR" sz="1000" dirty="0">
               <a:solidFill>
                 <a:schemeClr val="bg1"/>
               </a:solidFill>
@@ -12906,7 +12906,7 @@
           </a:p>
           <a:p>
             <a:r>
-              <a:rPr lang="fr-FR" sz="800" dirty="0">
+              <a:rPr lang="fr-FR" sz="1000" dirty="0">
                 <a:solidFill>
                   <a:schemeClr val="bg1"/>
                 </a:solidFill>
@@ -12916,7 +12916,7 @@
           </a:p>
           <a:p>
             <a:r>
-              <a:rPr lang="fr-FR" sz="800" dirty="0">
+              <a:rPr lang="fr-FR" sz="1000" dirty="0">
                 <a:solidFill>
                   <a:schemeClr val="bg1"/>
                 </a:solidFill>
@@ -12924,7 +12924,7 @@
               <a:t>    </a:t>
             </a:r>
             <a:r>
-              <a:rPr lang="fr-FR" sz="800" dirty="0" err="1">
+              <a:rPr lang="fr-FR" sz="1000" dirty="0" err="1">
                 <a:solidFill>
                   <a:schemeClr val="bg1"/>
                 </a:solidFill>
@@ -12932,7 +12932,7 @@
               <a:t>vl.Date</a:t>
             </a:r>
             <a:r>
-              <a:rPr lang="fr-FR" sz="800" dirty="0">
+              <a:rPr lang="fr-FR" sz="1000" dirty="0">
                 <a:solidFill>
                   <a:schemeClr val="bg1"/>
                 </a:solidFill>
@@ -12987,7 +12987,7 @@
         <p:spPr>
           <a:xfrm>
             <a:off x="930571" y="3631940"/>
-            <a:ext cx="7772758" cy="938719"/>
+            <a:ext cx="7772758" cy="769441"/>
           </a:xfrm>
           <a:prstGeom prst="rect">
             <a:avLst/>
@@ -13073,7 +13073,7 @@
                   </a:outerShdw>
                 </a:effectLst>
               </a:rPr>
-              <a:t>Il s’emblerais donc que des enregistrements pour le 14 ai été effectué le 15 ou que des dates erronées aient été saisi lors de la saisi le 14.</a:t>
+              <a:t>Il s’emblerais donc que des enregistrements pour le 14 ai été effectué le 15.</a:t>
             </a:r>
           </a:p>
         </p:txBody>
@@ -13165,7 +13165,7 @@
         <p:spPr>
           <a:xfrm>
             <a:off x="773434" y="1561894"/>
-            <a:ext cx="8087032" cy="2308324"/>
+            <a:ext cx="8087032" cy="2492990"/>
           </a:xfrm>
           <a:prstGeom prst="rect">
             <a:avLst/>
@@ -13597,6 +13597,24 @@
                 </a:solidFill>
               </a:rPr>
               <a:t>vente_détail</a:t>
+            </a:r>
+            <a:r>
+              <a:rPr lang="fr-FR" sz="1200" dirty="0">
+                <a:solidFill>
+                  <a:schemeClr val="bg1"/>
+                </a:solidFill>
+              </a:rPr>
+              <a:t> </a:t>
+            </a:r>
+            <a:r>
+              <a:rPr lang="fr-FR" sz="1200" i="1" dirty="0">
+                <a:solidFill>
+                  <a:schemeClr val="bg1">
+                    <a:lumMod val="65000"/>
+                  </a:schemeClr>
+                </a:solidFill>
+              </a:rPr>
+              <a:t>(et nécessitant la modification des droits en écriture des utilisateurs)</a:t>
             </a:r>
             <a:r>
               <a:rPr lang="fr-FR" sz="1200" dirty="0">
@@ -15045,7 +15063,7 @@
                   <a:schemeClr val="bg1"/>
                 </a:solidFill>
               </a:rPr>
-              <a:t> du </a:t>
+              <a:t> des </a:t>
             </a:r>
             <a:r>
               <a:rPr lang="fr-FR" sz="1100" b="1" dirty="0">
@@ -15053,7 +15071,7 @@
                   <a:schemeClr val="bg1"/>
                 </a:solidFill>
               </a:rPr>
-              <a:t>script</a:t>
+              <a:t>scripts </a:t>
             </a:r>
             <a:r>
               <a:rPr lang="fr-FR" sz="1100" dirty="0">
@@ -15061,7 +15079,7 @@
                   <a:schemeClr val="bg1"/>
                 </a:solidFill>
               </a:rPr>
-              <a:t> de modification de la base de données. </a:t>
+              <a:t>de modification de la base de données. </a:t>
             </a:r>
           </a:p>
           <a:p>
@@ -15383,7 +15401,7 @@
                   <a:schemeClr val="bg1"/>
                 </a:solidFill>
               </a:rPr>
-              <a:t> de fermeture </a:t>
+              <a:t> de fermeture et de clôture </a:t>
             </a:r>
             <a:r>
               <a:rPr lang="fr-FR" sz="1100" b="1" dirty="0">
@@ -18001,7 +18019,7 @@
                   </a:schemeClr>
                 </a:solidFill>
               </a:rPr>
-              <a:t>Validation et Lancement du Plan : Nous demandons la validation immédiate du Plan d'Action pour lancer la Phase 1 sans délai. Le suivi sera assuré par une révision hebdomadaire de la progression du Data </a:t>
+              <a:t>Validation et Lancement du Plan : Demande de validation immédiate du Plan d'Action pour lancer la Phase 1 sans délai. Le suivi sera assuré par une révision hebdomadaire de la progression du Data </a:t>
             </a:r>
             <a:r>
               <a:rPr lang="fr-FR" sz="1200" dirty="0" err="1">
